--- a/assets/figures-editable/appendix-studies/a-e13.pptx
+++ b/assets/figures-editable/appendix-studies/a-e13.pptx
@@ -7,7 +7,7 @@
   <p:sldIdLst>
     <p:sldId id="256" r:id="rId7"/>
   </p:sldIdLst>
-  <p:sldSz cx="8961120" cy="5660136" type="screen4x3"/>
+  <p:sldSz cx="12191695" cy="6858000" type="screen4x3"/>
   <p:notesSz cx="6858000" cy="9144000"/>
   <p:defaultTextStyle>
     <a:defPPr>
@@ -3098,14 +3098,14 @@
       <p:grpSpPr/>
       <p:sp>
         <p:nvSpPr>
-          <p:cNvPr id="2" name="text 0" descr="sci-ppt:obj-000"/>
+          <p:cNvPr id="2" name="A-E13 text 0" descr="sci-ppt:o000"/>
           <p:cNvSpPr txBox="1"/>
           <p:nvPr/>
         </p:nvSpPr>
         <p:spPr>
           <a:xfrm>
-            <a:off x="256032" y="137160"/>
-            <a:ext cx="7315200" cy="310896"/>
+            <a:off x="274320" y="118872"/>
+            <a:ext cx="11612880" cy="340105"/>
           </a:xfrm>
           <a:prstGeom prst="rect">
             <a:avLst/>
@@ -3114,7 +3114,7 @@
           <a:effectLst/>
         </p:spPr>
         <p:txBody>
-          <a:bodyPr wrap="none" lIns="0" rIns="0" tIns="0" bIns="0" anchor="ctr">
+          <a:bodyPr wrap="none" lIns="18288" rIns="18288" tIns="18288" bIns="18288" anchor="t">
             <a:spAutoFit/>
           </a:bodyPr>
           <a:lstStyle/>
@@ -3125,33 +3125,459 @@
               </a:spcAft>
             </a:pPr>
             <a:r>
-              <a:rPr sz="1439" b="0" i="0">
+              <a:rPr sz="1900" b="1" i="0">
                 <a:solidFill>
                   <a:srgbClr val="8EDBD4"/>
                 </a:solidFill>
                 <a:latin typeface="Arial"/>
               </a:rPr>
-              <a:t>A-E13 · Physical variable map</a:t>
-            </a:r>
-          </a:p>
-        </p:txBody>
-      </p:sp>
-      <p:sp>
-        <p:nvSpPr>
-          <p:cNvPr id="3" name="ellipse 1" descr="sci-ppt:obj-001"/>
-          <p:cNvSpPr/>
+              <a:t>A-E13 · Teaching-input substitution</a:t>
+            </a:r>
+          </a:p>
+        </p:txBody>
+      </p:sp>
+      <p:sp>
+        <p:nvSpPr>
+          <p:cNvPr id="3" name="A-E13 text 1" descr="sci-ppt:o001"/>
+          <p:cNvSpPr txBox="1"/>
           <p:nvPr/>
         </p:nvSpPr>
         <p:spPr>
           <a:xfrm>
-            <a:off x="1060704" y="914400"/>
-            <a:ext cx="1463040" cy="1463040"/>
-          </a:xfrm>
-          <a:prstGeom prst="ellipse">
+            <a:off x="457200" y="914400"/>
+            <a:ext cx="11247120" cy="254889"/>
+          </a:xfrm>
+          <a:prstGeom prst="rect">
             <a:avLst/>
           </a:prstGeom>
           <a:noFill/>
-          <a:ln w="17780">
+          <a:effectLst/>
+        </p:spPr>
+        <p:txBody>
+          <a:bodyPr wrap="none" lIns="18288" rIns="18288" tIns="18288" bIns="18288" anchor="t">
+            <a:spAutoFit/>
+          </a:bodyPr>
+          <a:lstStyle/>
+          <a:p>
+            <a:pPr algn="l">
+              <a:spcAft>
+                <a:spcPts val="0"/>
+              </a:spcAft>
+            </a:pPr>
+            <a:r>
+              <a:rPr sz="1350" b="1" i="0">
+                <a:solidFill>
+                  <a:srgbClr val="8EDBD4"/>
+                </a:solidFill>
+                <a:latin typeface="Arial"/>
+              </a:rPr>
+              <a:t>Teaching inputs: G_g = 20 kPa, R_ref = 5 µm, R = 30 µm (sixfold expansion)</a:t>
+            </a:r>
+          </a:p>
+        </p:txBody>
+      </p:sp>
+      <p:sp>
+        <p:nvSpPr>
+          <p:cNvPr id="4" name="A-E13 round_rect 2" descr="sci-ppt:o002"/>
+          <p:cNvSpPr/>
+          <p:nvPr/>
+        </p:nvSpPr>
+        <p:spPr>
+          <a:xfrm>
+            <a:off x="457200" y="1371600"/>
+            <a:ext cx="5486400" cy="2377440"/>
+          </a:xfrm>
+          <a:prstGeom prst="roundRect">
+            <a:avLst/>
+          </a:prstGeom>
+          <a:solidFill>
+            <a:srgbClr val="213E4B"/>
+          </a:solidFill>
+          <a:ln w="20320">
+            <a:solidFill>
+              <a:srgbClr val="7FC8F8"/>
+            </a:solidFill>
+          </a:ln>
+          <a:effectLst/>
+        </p:spPr>
+        <p:txBody>
+          <a:bodyPr rtlCol="0" anchor="ctr"/>
+          <a:lstStyle/>
+          <a:p>
+            <a:pPr algn="ctr"/>
+          </a:p>
+        </p:txBody>
+      </p:sp>
+      <p:sp>
+        <p:nvSpPr>
+          <p:cNvPr id="5" name="A-E13 text 3" descr="sci-ppt:o003"/>
+          <p:cNvSpPr txBox="1"/>
+          <p:nvPr/>
+        </p:nvSpPr>
+        <p:spPr>
+          <a:xfrm>
+            <a:off x="566928" y="1426464"/>
+            <a:ext cx="5266944" cy="254889"/>
+          </a:xfrm>
+          <a:prstGeom prst="rect">
+            <a:avLst/>
+          </a:prstGeom>
+          <a:noFill/>
+          <a:effectLst/>
+        </p:spPr>
+        <p:txBody>
+          <a:bodyPr wrap="none" lIns="18288" rIns="18288" tIns="18288" bIns="18288" anchor="t">
+            <a:spAutoFit/>
+          </a:bodyPr>
+          <a:lstStyle/>
+          <a:p>
+            <a:pPr algn="l">
+              <a:spcAft>
+                <a:spcPts val="0"/>
+              </a:spcAft>
+            </a:pPr>
+            <a:r>
+              <a:rPr sz="1350" b="1" i="0">
+                <a:solidFill>
+                  <a:srgbClr val="7FC8F8"/>
+                </a:solidFill>
+                <a:latin typeface="Arial"/>
+              </a:rPr>
+              <a:t>Elastic resistance</a:t>
+            </a:r>
+          </a:p>
+        </p:txBody>
+      </p:sp>
+      <p:sp>
+        <p:nvSpPr>
+          <p:cNvPr id="6" name="A-E13 text 4" descr="sci-ppt:o004"/>
+          <p:cNvSpPr txBox="1"/>
+          <p:nvPr/>
+        </p:nvSpPr>
+        <p:spPr>
+          <a:xfrm>
+            <a:off x="594360" y="1828800"/>
+            <a:ext cx="5212080" cy="239395"/>
+          </a:xfrm>
+          <a:prstGeom prst="rect">
+            <a:avLst/>
+          </a:prstGeom>
+          <a:noFill/>
+          <a:effectLst/>
+        </p:spPr>
+        <p:txBody>
+          <a:bodyPr wrap="none" lIns="18288" rIns="18288" tIns="18288" bIns="18288" anchor="t">
+            <a:spAutoFit/>
+          </a:bodyPr>
+          <a:lstStyle/>
+          <a:p>
+            <a:pPr algn="l">
+              <a:spcAft>
+                <a:spcPts val="0"/>
+              </a:spcAft>
+            </a:pPr>
+            <a:r>
+              <a:rPr sz="1250" b="1" i="0">
+                <a:solidFill>
+                  <a:srgbClr val="E7F0F3"/>
+                </a:solidFill>
+                <a:latin typeface="Arial"/>
+              </a:rPr>
+              <a:t>pₑₗ = (G_g/2)[5 − 4(5/30) − (5/30)⁴]</a:t>
+            </a:r>
+          </a:p>
+        </p:txBody>
+      </p:sp>
+      <p:sp>
+        <p:nvSpPr>
+          <p:cNvPr id="7" name="A-E13 text 5" descr="sci-ppt:o005"/>
+          <p:cNvSpPr txBox="1"/>
+          <p:nvPr/>
+        </p:nvSpPr>
+        <p:spPr>
+          <a:xfrm>
+            <a:off x="594360" y="2331720"/>
+            <a:ext cx="5212080" cy="293623"/>
+          </a:xfrm>
+          <a:prstGeom prst="rect">
+            <a:avLst/>
+          </a:prstGeom>
+          <a:noFill/>
+          <a:effectLst/>
+        </p:spPr>
+        <p:txBody>
+          <a:bodyPr wrap="none" lIns="18288" rIns="18288" tIns="18288" bIns="18288" anchor="t">
+            <a:spAutoFit/>
+          </a:bodyPr>
+          <a:lstStyle/>
+          <a:p>
+            <a:pPr algn="l">
+              <a:spcAft>
+                <a:spcPts val="0"/>
+              </a:spcAft>
+            </a:pPr>
+            <a:r>
+              <a:rPr sz="1600" b="1" i="0">
+                <a:solidFill>
+                  <a:srgbClr val="7FC8F8"/>
+                </a:solidFill>
+                <a:latin typeface="Arial"/>
+              </a:rPr>
+              <a:t>pₑₗ = 43325.6173 Pa</a:t>
+            </a:r>
+          </a:p>
+        </p:txBody>
+      </p:sp>
+      <p:sp>
+        <p:nvSpPr>
+          <p:cNvPr id="8" name="A-E13 text 6" descr="sci-ppt:o006"/>
+          <p:cNvSpPr txBox="1"/>
+          <p:nvPr/>
+        </p:nvSpPr>
+        <p:spPr>
+          <a:xfrm>
+            <a:off x="594360" y="2926080"/>
+            <a:ext cx="5212080" cy="231648"/>
+          </a:xfrm>
+          <a:prstGeom prst="rect">
+            <a:avLst/>
+          </a:prstGeom>
+          <a:noFill/>
+          <a:effectLst/>
+        </p:spPr>
+        <p:txBody>
+          <a:bodyPr wrap="none" lIns="18288" rIns="18288" tIns="18288" bIns="18288" anchor="t">
+            <a:spAutoFit/>
+          </a:bodyPr>
+          <a:lstStyle/>
+          <a:p>
+            <a:pPr algn="l">
+              <a:spcAft>
+                <a:spcPts val="0"/>
+              </a:spcAft>
+            </a:pPr>
+            <a:r>
+              <a:rPr sz="1200" b="0" i="0">
+                <a:solidFill>
+                  <a:srgbClr val="B4C7D2"/>
+                </a:solidFill>
+                <a:latin typeface="Arial"/>
+              </a:rPr>
+              <a:t>about 43 kPa: well below 100 kPa</a:t>
+            </a:r>
+          </a:p>
+        </p:txBody>
+      </p:sp>
+      <p:sp>
+        <p:nvSpPr>
+          <p:cNvPr id="9" name="A-E13 round_rect 7" descr="sci-ppt:o007"/>
+          <p:cNvSpPr/>
+          <p:nvPr/>
+        </p:nvSpPr>
+        <p:spPr>
+          <a:xfrm>
+            <a:off x="6217920" y="1371600"/>
+            <a:ext cx="5486400" cy="2377440"/>
+          </a:xfrm>
+          <a:prstGeom prst="roundRect">
+            <a:avLst/>
+          </a:prstGeom>
+          <a:solidFill>
+            <a:srgbClr val="213E4B"/>
+          </a:solidFill>
+          <a:ln w="20320">
+            <a:solidFill>
+              <a:srgbClr val="F2B880"/>
+            </a:solidFill>
+          </a:ln>
+          <a:effectLst/>
+        </p:spPr>
+        <p:txBody>
+          <a:bodyPr rtlCol="0" anchor="ctr"/>
+          <a:lstStyle/>
+          <a:p>
+            <a:pPr algn="ctr"/>
+          </a:p>
+        </p:txBody>
+      </p:sp>
+      <p:sp>
+        <p:nvSpPr>
+          <p:cNvPr id="10" name="A-E13 text 8" descr="sci-ppt:o008"/>
+          <p:cNvSpPr txBox="1"/>
+          <p:nvPr/>
+        </p:nvSpPr>
+        <p:spPr>
+          <a:xfrm>
+            <a:off x="6327648" y="1426464"/>
+            <a:ext cx="5266944" cy="254889"/>
+          </a:xfrm>
+          <a:prstGeom prst="rect">
+            <a:avLst/>
+          </a:prstGeom>
+          <a:noFill/>
+          <a:effectLst/>
+        </p:spPr>
+        <p:txBody>
+          <a:bodyPr wrap="none" lIns="18288" rIns="18288" tIns="18288" bIns="18288" anchor="t">
+            <a:spAutoFit/>
+          </a:bodyPr>
+          <a:lstStyle/>
+          <a:p>
+            <a:pPr algn="l">
+              <a:spcAft>
+                <a:spcPts val="0"/>
+              </a:spcAft>
+            </a:pPr>
+            <a:r>
+              <a:rPr sz="1350" b="1" i="0">
+                <a:solidFill>
+                  <a:srgbClr val="F2B880"/>
+                </a:solidFill>
+                <a:latin typeface="Arial"/>
+              </a:rPr>
+              <a:t>Stored work</a:t>
+            </a:r>
+          </a:p>
+        </p:txBody>
+      </p:sp>
+      <p:sp>
+        <p:nvSpPr>
+          <p:cNvPr id="11" name="A-E13 text 9" descr="sci-ppt:o009"/>
+          <p:cNvSpPr txBox="1"/>
+          <p:nvPr/>
+        </p:nvSpPr>
+        <p:spPr>
+          <a:xfrm>
+            <a:off x="6355080" y="1828800"/>
+            <a:ext cx="5212080" cy="223900"/>
+          </a:xfrm>
+          <a:prstGeom prst="rect">
+            <a:avLst/>
+          </a:prstGeom>
+          <a:noFill/>
+          <a:effectLst/>
+        </p:spPr>
+        <p:txBody>
+          <a:bodyPr wrap="none" lIns="18288" rIns="18288" tIns="18288" bIns="18288" anchor="t">
+            <a:spAutoFit/>
+          </a:bodyPr>
+          <a:lstStyle/>
+          <a:p>
+            <a:pPr algn="l">
+              <a:spcAft>
+                <a:spcPts val="0"/>
+              </a:spcAft>
+            </a:pPr>
+            <a:r>
+              <a:rPr sz="1150" b="1" i="0">
+                <a:solidFill>
+                  <a:srgbClr val="E7F0F3"/>
+                </a:solidFill>
+                <a:latin typeface="Arial"/>
+              </a:rPr>
+              <a:t>W_g = 2πG_g[5R³/3 − 2R_refR² + R_ref⁴/R − 2R_ref³/3]</a:t>
+            </a:r>
+          </a:p>
+        </p:txBody>
+      </p:sp>
+      <p:sp>
+        <p:nvSpPr>
+          <p:cNvPr id="12" name="A-E13 text 10" descr="sci-ppt:o010"/>
+          <p:cNvSpPr txBox="1"/>
+          <p:nvPr/>
+        </p:nvSpPr>
+        <p:spPr>
+          <a:xfrm>
+            <a:off x="6355080" y="2331720"/>
+            <a:ext cx="5212080" cy="278130"/>
+          </a:xfrm>
+          <a:prstGeom prst="rect">
+            <a:avLst/>
+          </a:prstGeom>
+          <a:noFill/>
+          <a:effectLst/>
+        </p:spPr>
+        <p:txBody>
+          <a:bodyPr wrap="none" lIns="18288" rIns="18288" tIns="18288" bIns="18288" anchor="t">
+            <a:spAutoFit/>
+          </a:bodyPr>
+          <a:lstStyle/>
+          <a:p>
+            <a:pPr algn="l">
+              <a:spcAft>
+                <a:spcPts val="0"/>
+              </a:spcAft>
+            </a:pPr>
+            <a:r>
+              <a:rPr sz="1500" b="1" i="0">
+                <a:solidFill>
+                  <a:srgbClr val="F2B880"/>
+                </a:solidFill>
+                <a:latin typeface="Arial"/>
+              </a:rPr>
+              <a:t>W_g = 4.51603944e-09 J = 4.5160 nJ</a:t>
+            </a:r>
+          </a:p>
+        </p:txBody>
+      </p:sp>
+      <p:sp>
+        <p:nvSpPr>
+          <p:cNvPr id="13" name="A-E13 text 11" descr="sci-ppt:o011"/>
+          <p:cNvSpPr txBox="1"/>
+          <p:nvPr/>
+        </p:nvSpPr>
+        <p:spPr>
+          <a:xfrm>
+            <a:off x="6355080" y="2926080"/>
+            <a:ext cx="5212080" cy="231648"/>
+          </a:xfrm>
+          <a:prstGeom prst="rect">
+            <a:avLst/>
+          </a:prstGeom>
+          <a:noFill/>
+          <a:effectLst/>
+        </p:spPr>
+        <p:txBody>
+          <a:bodyPr wrap="none" lIns="18288" rIns="18288" tIns="18288" bIns="18288" anchor="t">
+            <a:spAutoFit/>
+          </a:bodyPr>
+          <a:lstStyle/>
+          <a:p>
+            <a:pPr algn="l">
+              <a:spcAft>
+                <a:spcPts val="0"/>
+              </a:spcAft>
+            </a:pPr>
+            <a:r>
+              <a:rPr sz="1200" b="0" i="0">
+                <a:solidFill>
+                  <a:srgbClr val="B4C7D2"/>
+                </a:solidFill>
+                <a:latin typeface="Arial"/>
+              </a:rPr>
+              <a:t>several nanojoules for a soft network</a:t>
+            </a:r>
+          </a:p>
+        </p:txBody>
+      </p:sp>
+      <p:sp>
+        <p:nvSpPr>
+          <p:cNvPr id="14" name="A-E13 round_rect 12" descr="sci-ppt:o012"/>
+          <p:cNvSpPr/>
+          <p:nvPr/>
+        </p:nvSpPr>
+        <p:spPr>
+          <a:xfrm>
+            <a:off x="457200" y="4114800"/>
+            <a:ext cx="3383280" cy="1005840"/>
+          </a:xfrm>
+          <a:prstGeom prst="roundRect">
+            <a:avLst/>
+          </a:prstGeom>
+          <a:solidFill>
+            <a:srgbClr val="213E4B"/>
+          </a:solidFill>
+          <a:ln w="20320">
             <a:solidFill>
               <a:srgbClr val="B4C7D2"/>
             </a:solidFill>
@@ -3168,24 +3594,128 @@
       </p:sp>
       <p:sp>
         <p:nvSpPr>
-          <p:cNvPr id="4" name="ellipse 2" descr="sci-ppt:obj-002"/>
+          <p:cNvPr id="15" name="A-E13 text 13" descr="sci-ppt:o013"/>
+          <p:cNvSpPr txBox="1"/>
+          <p:nvPr/>
+        </p:nvSpPr>
+        <p:spPr>
+          <a:xfrm>
+            <a:off x="530352" y="4169663"/>
+            <a:ext cx="3236976" cy="254889"/>
+          </a:xfrm>
+          <a:prstGeom prst="rect">
+            <a:avLst/>
+          </a:prstGeom>
+          <a:noFill/>
+          <a:effectLst/>
+        </p:spPr>
+        <p:txBody>
+          <a:bodyPr wrap="none" lIns="18288" rIns="18288" tIns="18288" bIns="18288" anchor="t">
+            <a:spAutoFit/>
+          </a:bodyPr>
+          <a:lstStyle/>
+          <a:p>
+            <a:pPr algn="ctr">
+              <a:spcAft>
+                <a:spcPts val="0"/>
+              </a:spcAft>
+            </a:pPr>
+            <a:r>
+              <a:rPr sz="1350" b="1" i="0">
+                <a:solidFill>
+                  <a:srgbClr val="B4C7D2"/>
+                </a:solidFill>
+                <a:latin typeface="Arial"/>
+              </a:rPr>
+              <a:t>R/R_ref</a:t>
+            </a:r>
+          </a:p>
+        </p:txBody>
+      </p:sp>
+      <p:sp>
+        <p:nvSpPr>
+          <p:cNvPr id="16" name="A-E13 text 14" descr="sci-ppt:o014"/>
+          <p:cNvSpPr txBox="1"/>
+          <p:nvPr/>
+        </p:nvSpPr>
+        <p:spPr>
+          <a:xfrm>
+            <a:off x="530352" y="4442840"/>
+            <a:ext cx="3236976" cy="239395"/>
+          </a:xfrm>
+          <a:prstGeom prst="rect">
+            <a:avLst/>
+          </a:prstGeom>
+          <a:noFill/>
+          <a:effectLst/>
+        </p:spPr>
+        <p:txBody>
+          <a:bodyPr wrap="none" lIns="18288" rIns="18288" tIns="18288" bIns="18288" anchor="t">
+            <a:spAutoFit/>
+          </a:bodyPr>
+          <a:lstStyle/>
+          <a:p>
+            <a:pPr algn="ctr">
+              <a:spcAft>
+                <a:spcPts val="0"/>
+              </a:spcAft>
+            </a:pPr>
+            <a:r>
+              <a:rPr sz="1250" b="0" i="0">
+                <a:solidFill>
+                  <a:srgbClr val="E7F0F3"/>
+                </a:solidFill>
+                <a:latin typeface="Arial"/>
+              </a:rPr>
+              <a:t>30 / 5 = 6</a:t>
+            </a:r>
+          </a:p>
+        </p:txBody>
+      </p:sp>
+      <p:cxnSp>
+        <p:nvCxnSpPr>
+          <p:cNvPr id="17" name="A-E13 arrow 15" descr="sci-ppt:o015"/>
+          <p:cNvCxnSpPr/>
+          <p:nvPr/>
+        </p:nvCxnSpPr>
+        <p:spPr>
+          <a:xfrm>
+            <a:off x="3867912" y="4617720"/>
+            <a:ext cx="493776" cy="0"/>
+          </a:xfrm>
+          <a:prstGeom prst="line">
+            <a:avLst/>
+          </a:prstGeom>
+          <a:ln w="27940">
+            <a:solidFill>
+              <a:srgbClr val="B4C7D2"/>
+            </a:solidFill>
+            <a:headEnd type="none" w="med" len="med"/>
+            <a:tailEnd type="triangle" w="med" len="med"/>
+          </a:ln>
+          <a:effectLst/>
+        </p:spPr>
+      </p:cxnSp>
+      <p:sp>
+        <p:nvSpPr>
+          <p:cNvPr id="18" name="A-E13 round_rect 16" descr="sci-ppt:o016"/>
           <p:cNvSpPr/>
           <p:nvPr/>
         </p:nvSpPr>
         <p:spPr>
           <a:xfrm>
-            <a:off x="1463040" y="1316736"/>
-            <a:ext cx="658368" cy="658368"/>
-          </a:xfrm>
-          <a:prstGeom prst="ellipse">
+            <a:off x="4389120" y="4114800"/>
+            <a:ext cx="3383280" cy="1005840"/>
+          </a:xfrm>
+          <a:prstGeom prst="roundRect">
             <a:avLst/>
           </a:prstGeom>
           <a:solidFill>
             <a:srgbClr val="213E4B"/>
           </a:solidFill>
-          <a:ln w="17780">
+          <a:ln w="20320">
             <a:solidFill>
-              <a:srgbClr val="B4C7D2"/>
+              <a:srgbClr val="7FC8F8"/>
             </a:solidFill>
           </a:ln>
           <a:effectLst/>
@@ -3198,23 +3728,103 @@
           </a:p>
         </p:txBody>
       </p:sp>
+      <p:sp>
+        <p:nvSpPr>
+          <p:cNvPr id="19" name="A-E13 text 17" descr="sci-ppt:o017"/>
+          <p:cNvSpPr txBox="1"/>
+          <p:nvPr/>
+        </p:nvSpPr>
+        <p:spPr>
+          <a:xfrm>
+            <a:off x="4462272" y="4169663"/>
+            <a:ext cx="3236976" cy="254889"/>
+          </a:xfrm>
+          <a:prstGeom prst="rect">
+            <a:avLst/>
+          </a:prstGeom>
+          <a:noFill/>
+          <a:effectLst/>
+        </p:spPr>
+        <p:txBody>
+          <a:bodyPr wrap="none" lIns="18288" rIns="18288" tIns="18288" bIns="18288" anchor="t">
+            <a:spAutoFit/>
+          </a:bodyPr>
+          <a:lstStyle/>
+          <a:p>
+            <a:pPr algn="ctr">
+              <a:spcAft>
+                <a:spcPts val="0"/>
+              </a:spcAft>
+            </a:pPr>
+            <a:r>
+              <a:rPr sz="1350" b="1" i="0">
+                <a:solidFill>
+                  <a:srgbClr val="7FC8F8"/>
+                </a:solidFill>
+                <a:latin typeface="Arial"/>
+              </a:rPr>
+              <a:t>pₑₗ</a:t>
+            </a:r>
+          </a:p>
+        </p:txBody>
+      </p:sp>
+      <p:sp>
+        <p:nvSpPr>
+          <p:cNvPr id="20" name="A-E13 text 18" descr="sci-ppt:o018"/>
+          <p:cNvSpPr txBox="1"/>
+          <p:nvPr/>
+        </p:nvSpPr>
+        <p:spPr>
+          <a:xfrm>
+            <a:off x="4462272" y="4442840"/>
+            <a:ext cx="3236976" cy="239395"/>
+          </a:xfrm>
+          <a:prstGeom prst="rect">
+            <a:avLst/>
+          </a:prstGeom>
+          <a:noFill/>
+          <a:effectLst/>
+        </p:spPr>
+        <p:txBody>
+          <a:bodyPr wrap="none" lIns="18288" rIns="18288" tIns="18288" bIns="18288" anchor="t">
+            <a:spAutoFit/>
+          </a:bodyPr>
+          <a:lstStyle/>
+          <a:p>
+            <a:pPr algn="ctr">
+              <a:spcAft>
+                <a:spcPts val="0"/>
+              </a:spcAft>
+            </a:pPr>
+            <a:r>
+              <a:rPr sz="1250" b="0" i="0">
+                <a:solidFill>
+                  <a:srgbClr val="E7F0F3"/>
+                </a:solidFill>
+                <a:latin typeface="Arial"/>
+              </a:rPr>
+              <a:t>43.33 kPa</a:t>
+            </a:r>
+          </a:p>
+        </p:txBody>
+      </p:sp>
       <p:cxnSp>
         <p:nvCxnSpPr>
-          <p:cNvPr id="5" name="arrow 3" descr="sci-ppt:obj-003"/>
+          <p:cNvPr id="21" name="A-E13 arrow 19" descr="sci-ppt:o019"/>
           <p:cNvCxnSpPr/>
           <p:nvPr/>
         </p:nvCxnSpPr>
         <p:spPr>
           <a:xfrm>
-            <a:off x="1792224" y="1645920"/>
-            <a:ext cx="329184" cy="0"/>
+            <a:off x="7799832" y="4617720"/>
+            <a:ext cx="493776" cy="0"/>
           </a:xfrm>
           <a:prstGeom prst="line">
             <a:avLst/>
           </a:prstGeom>
-          <a:ln w="21590">
+          <a:ln w="27940">
             <a:solidFill>
-              <a:srgbClr val="8EDBD4"/>
+              <a:srgbClr val="B4C7D2"/>
             </a:solidFill>
             <a:headEnd type="none" w="med" len="med"/>
             <a:tailEnd type="triangle" w="med" len="med"/>
@@ -3224,14 +3834,46 @@
       </p:cxnSp>
       <p:sp>
         <p:nvSpPr>
-          <p:cNvPr id="6" name="text 4" descr="sci-ppt:obj-004"/>
+          <p:cNvPr id="22" name="A-E13 round_rect 20" descr="sci-ppt:o020"/>
+          <p:cNvSpPr/>
+          <p:nvPr/>
+        </p:nvSpPr>
+        <p:spPr>
+          <a:xfrm>
+            <a:off x="8321040" y="4114800"/>
+            <a:ext cx="3383280" cy="1005840"/>
+          </a:xfrm>
+          <a:prstGeom prst="roundRect">
+            <a:avLst/>
+          </a:prstGeom>
+          <a:solidFill>
+            <a:srgbClr val="213E4B"/>
+          </a:solidFill>
+          <a:ln w="20320">
+            <a:solidFill>
+              <a:srgbClr val="F2B880"/>
+            </a:solidFill>
+          </a:ln>
+          <a:effectLst/>
+        </p:spPr>
+        <p:txBody>
+          <a:bodyPr rtlCol="0" anchor="ctr"/>
+          <a:lstStyle/>
+          <a:p>
+            <a:pPr algn="ctr"/>
+          </a:p>
+        </p:txBody>
+      </p:sp>
+      <p:sp>
+        <p:nvSpPr>
+          <p:cNvPr id="23" name="A-E13 text 21" descr="sci-ppt:o021"/>
           <p:cNvSpPr txBox="1"/>
           <p:nvPr/>
         </p:nvSpPr>
         <p:spPr>
           <a:xfrm>
-            <a:off x="1755648" y="1271016"/>
-            <a:ext cx="1097280" cy="310896"/>
+            <a:off x="8394192" y="4169663"/>
+            <a:ext cx="3236976" cy="254889"/>
           </a:xfrm>
           <a:prstGeom prst="rect">
             <a:avLst/>
@@ -3240,7 +3882,87 @@
           <a:effectLst/>
         </p:spPr>
         <p:txBody>
-          <a:bodyPr wrap="none" lIns="0" rIns="0" tIns="0" bIns="0" anchor="ctr">
+          <a:bodyPr wrap="none" lIns="18288" rIns="18288" tIns="18288" bIns="18288" anchor="t">
+            <a:spAutoFit/>
+          </a:bodyPr>
+          <a:lstStyle/>
+          <a:p>
+            <a:pPr algn="ctr">
+              <a:spcAft>
+                <a:spcPts val="0"/>
+              </a:spcAft>
+            </a:pPr>
+            <a:r>
+              <a:rPr sz="1350" b="1" i="0">
+                <a:solidFill>
+                  <a:srgbClr val="F2B880"/>
+                </a:solidFill>
+                <a:latin typeface="Arial"/>
+              </a:rPr>
+              <a:t>W_g</a:t>
+            </a:r>
+          </a:p>
+        </p:txBody>
+      </p:sp>
+      <p:sp>
+        <p:nvSpPr>
+          <p:cNvPr id="24" name="A-E13 text 22" descr="sci-ppt:o022"/>
+          <p:cNvSpPr txBox="1"/>
+          <p:nvPr/>
+        </p:nvSpPr>
+        <p:spPr>
+          <a:xfrm>
+            <a:off x="8394192" y="4442840"/>
+            <a:ext cx="3236976" cy="239395"/>
+          </a:xfrm>
+          <a:prstGeom prst="rect">
+            <a:avLst/>
+          </a:prstGeom>
+          <a:noFill/>
+          <a:effectLst/>
+        </p:spPr>
+        <p:txBody>
+          <a:bodyPr wrap="none" lIns="18288" rIns="18288" tIns="18288" bIns="18288" anchor="t">
+            <a:spAutoFit/>
+          </a:bodyPr>
+          <a:lstStyle/>
+          <a:p>
+            <a:pPr algn="ctr">
+              <a:spcAft>
+                <a:spcPts val="0"/>
+              </a:spcAft>
+            </a:pPr>
+            <a:r>
+              <a:rPr sz="1250" b="0" i="0">
+                <a:solidFill>
+                  <a:srgbClr val="E7F0F3"/>
+                </a:solidFill>
+                <a:latin typeface="Arial"/>
+              </a:rPr>
+              <a:t>4.516 nJ</a:t>
+            </a:r>
+          </a:p>
+        </p:txBody>
+      </p:sp>
+      <p:sp>
+        <p:nvSpPr>
+          <p:cNvPr id="25" name="A-E13 text 23" descr="sci-ppt:o023"/>
+          <p:cNvSpPr txBox="1"/>
+          <p:nvPr/>
+        </p:nvSpPr>
+        <p:spPr>
+          <a:xfrm>
+            <a:off x="457200" y="5486400"/>
+            <a:ext cx="11247120" cy="239395"/>
+          </a:xfrm>
+          <a:prstGeom prst="rect">
+            <a:avLst/>
+          </a:prstGeom>
+          <a:noFill/>
+          <a:effectLst/>
+        </p:spPr>
+        <p:txBody>
+          <a:bodyPr wrap="none" lIns="18288" rIns="18288" tIns="18288" bIns="18288" anchor="t">
             <a:spAutoFit/>
           </a:bodyPr>
           <a:lstStyle/>
@@ -3251,51 +3973,27 @@
               </a:spcAft>
             </a:pPr>
             <a:r>
-              <a:rPr sz="1296" b="0" i="0">
+              <a:rPr sz="1250" b="0" i="0">
                 <a:solidFill>
                   <a:srgbClr val="E7F0F3"/>
                 </a:solidFill>
                 <a:latin typeface="Arial"/>
               </a:rPr>
-              <a:t>Rref</a:t>
-            </a:r>
-          </a:p>
-        </p:txBody>
-      </p:sp>
-      <p:cxnSp>
-        <p:nvCxnSpPr>
-          <p:cNvPr id="7" name="arrow 5" descr="sci-ppt:obj-005"/>
-          <p:cNvCxnSpPr/>
-          <p:nvPr/>
-        </p:nvCxnSpPr>
-        <p:spPr>
-          <a:xfrm>
-            <a:off x="1792224" y="1645920"/>
-            <a:ext cx="517262" cy="517262"/>
-          </a:xfrm>
-          <a:prstGeom prst="line">
-            <a:avLst/>
-          </a:prstGeom>
-          <a:ln w="21590">
-            <a:solidFill>
-              <a:srgbClr val="8EDBD4"/>
-            </a:solidFill>
-            <a:headEnd type="none" w="med" len="med"/>
-            <a:tailEnd type="triangle" w="med" len="med"/>
-          </a:ln>
-          <a:effectLst/>
-        </p:spPr>
-      </p:cxnSp>
-      <p:sp>
-        <p:nvSpPr>
-          <p:cNvPr id="8" name="text 6" descr="sci-ppt:obj-006"/>
+              <a:t>The pressure alone looks harmless; the work, accumulated over the whole expansion, is a finite share of the budget (next figure).</a:t>
+            </a:r>
+          </a:p>
+        </p:txBody>
+      </p:sp>
+      <p:sp>
+        <p:nvSpPr>
+          <p:cNvPr id="26" name="A-E13 text 24" descr="sci-ppt:o024"/>
           <p:cNvSpPr txBox="1"/>
           <p:nvPr/>
         </p:nvSpPr>
         <p:spPr>
           <a:xfrm>
-            <a:off x="2304288" y="2139696"/>
-            <a:ext cx="822960" cy="310896"/>
+            <a:off x="320040" y="6510528"/>
+            <a:ext cx="11521440" cy="200660"/>
           </a:xfrm>
           <a:prstGeom prst="rect">
             <a:avLst/>
@@ -3304,7 +4002,7 @@
           <a:effectLst/>
         </p:spPr>
         <p:txBody>
-          <a:bodyPr wrap="none" lIns="0" rIns="0" tIns="0" bIns="0" anchor="ctr">
+          <a:bodyPr wrap="none" lIns="18288" rIns="18288" tIns="18288" bIns="18288" anchor="t">
             <a:spAutoFit/>
           </a:bodyPr>
           <a:lstStyle/>
@@ -3315,867 +4013,13 @@
               </a:spcAft>
             </a:pPr>
             <a:r>
-              <a:rPr sz="1296" b="0" i="0">
+              <a:rPr sz="1000" b="0" i="0">
                 <a:solidFill>
-                  <a:srgbClr val="E7F0F3"/>
+                  <a:srgbClr val="B4C7D2"/>
                 </a:solidFill>
                 <a:latin typeface="Arial"/>
               </a:rPr>
-              <a:t>r₀</a:t>
-            </a:r>
-          </a:p>
-        </p:txBody>
-      </p:sp>
-      <p:sp>
-        <p:nvSpPr>
-          <p:cNvPr id="9" name="ellipse 7" descr="sci-ppt:obj-007"/>
-          <p:cNvSpPr/>
-          <p:nvPr/>
-        </p:nvSpPr>
-        <p:spPr>
-          <a:xfrm>
-            <a:off x="4682139" y="750219"/>
-            <a:ext cx="1791401" cy="1791401"/>
-          </a:xfrm>
-          <a:prstGeom prst="ellipse">
-            <a:avLst/>
-          </a:prstGeom>
-          <a:noFill/>
-          <a:ln w="17780">
-            <a:solidFill>
-              <a:srgbClr val="B4C7D2"/>
-            </a:solidFill>
-          </a:ln>
-          <a:effectLst/>
-        </p:spPr>
-        <p:txBody>
-          <a:bodyPr rtlCol="0" anchor="ctr"/>
-          <a:lstStyle/>
-          <a:p>
-            <a:pPr algn="ctr"/>
-          </a:p>
-        </p:txBody>
-      </p:sp>
-      <p:sp>
-        <p:nvSpPr>
-          <p:cNvPr id="10" name="ellipse 8" descr="sci-ppt:obj-008"/>
-          <p:cNvSpPr/>
-          <p:nvPr/>
-        </p:nvSpPr>
-        <p:spPr>
-          <a:xfrm>
-            <a:off x="4864608" y="932688"/>
-            <a:ext cx="1426464" cy="1426464"/>
-          </a:xfrm>
-          <a:prstGeom prst="ellipse">
-            <a:avLst/>
-          </a:prstGeom>
-          <a:solidFill>
-            <a:srgbClr val="213E4B"/>
-          </a:solidFill>
-          <a:ln w="17780">
-            <a:solidFill>
-              <a:srgbClr val="B4C7D2"/>
-            </a:solidFill>
-          </a:ln>
-          <a:effectLst/>
-        </p:spPr>
-        <p:txBody>
-          <a:bodyPr rtlCol="0" anchor="ctr"/>
-          <a:lstStyle/>
-          <a:p>
-            <a:pPr algn="ctr"/>
-          </a:p>
-        </p:txBody>
-      </p:sp>
-      <p:cxnSp>
-        <p:nvCxnSpPr>
-          <p:cNvPr id="11" name="arrow 9" descr="sci-ppt:obj-009"/>
-          <p:cNvCxnSpPr/>
-          <p:nvPr/>
-        </p:nvCxnSpPr>
-        <p:spPr>
-          <a:xfrm>
-            <a:off x="5577840" y="1645920"/>
-            <a:ext cx="713232" cy="0"/>
-          </a:xfrm>
-          <a:prstGeom prst="line">
-            <a:avLst/>
-          </a:prstGeom>
-          <a:ln w="21590">
-            <a:solidFill>
-              <a:srgbClr val="8EDBD4"/>
-            </a:solidFill>
-            <a:headEnd type="none" w="med" len="med"/>
-            <a:tailEnd type="triangle" w="med" len="med"/>
-          </a:ln>
-          <a:effectLst/>
-        </p:spPr>
-      </p:cxnSp>
-      <p:sp>
-        <p:nvSpPr>
-          <p:cNvPr id="12" name="text 10" descr="sci-ppt:obj-010"/>
-          <p:cNvSpPr txBox="1"/>
-          <p:nvPr/>
-        </p:nvSpPr>
-        <p:spPr>
-          <a:xfrm>
-            <a:off x="5952744" y="1271016"/>
-            <a:ext cx="640080" cy="310896"/>
-          </a:xfrm>
-          <a:prstGeom prst="rect">
-            <a:avLst/>
-          </a:prstGeom>
-          <a:noFill/>
-          <a:effectLst/>
-        </p:spPr>
-        <p:txBody>
-          <a:bodyPr wrap="none" lIns="0" rIns="0" tIns="0" bIns="0" anchor="ctr">
-            <a:spAutoFit/>
-          </a:bodyPr>
-          <a:lstStyle/>
-          <a:p>
-            <a:pPr algn="l">
-              <a:spcAft>
-                <a:spcPts val="0"/>
-              </a:spcAft>
-            </a:pPr>
-            <a:r>
-              <a:rPr sz="1296" b="0" i="0">
-                <a:solidFill>
-                  <a:srgbClr val="E7F0F3"/>
-                </a:solidFill>
-                <a:latin typeface="Arial"/>
-              </a:rPr>
-              <a:t>R</a:t>
-            </a:r>
-          </a:p>
-        </p:txBody>
-      </p:sp>
-      <p:cxnSp>
-        <p:nvCxnSpPr>
-          <p:cNvPr id="13" name="arrow 11" descr="sci-ppt:obj-011"/>
-          <p:cNvCxnSpPr/>
-          <p:nvPr/>
-        </p:nvCxnSpPr>
-        <p:spPr>
-          <a:xfrm>
-            <a:off x="5577840" y="1645920"/>
-            <a:ext cx="633355" cy="633355"/>
-          </a:xfrm>
-          <a:prstGeom prst="line">
-            <a:avLst/>
-          </a:prstGeom>
-          <a:ln w="21590">
-            <a:solidFill>
-              <a:srgbClr val="8EDBD4"/>
-            </a:solidFill>
-            <a:headEnd type="none" w="med" len="med"/>
-            <a:tailEnd type="triangle" w="med" len="med"/>
-          </a:ln>
-          <a:effectLst/>
-        </p:spPr>
-      </p:cxnSp>
-      <p:sp>
-        <p:nvSpPr>
-          <p:cNvPr id="14" name="text 12" descr="sci-ppt:obj-012"/>
-          <p:cNvSpPr txBox="1"/>
-          <p:nvPr/>
-        </p:nvSpPr>
-        <p:spPr>
-          <a:xfrm>
-            <a:off x="6373368" y="2231136"/>
-            <a:ext cx="640080" cy="310896"/>
-          </a:xfrm>
-          <a:prstGeom prst="rect">
-            <a:avLst/>
-          </a:prstGeom>
-          <a:noFill/>
-          <a:effectLst/>
-        </p:spPr>
-        <p:txBody>
-          <a:bodyPr wrap="none" lIns="0" rIns="0" tIns="0" bIns="0" anchor="ctr">
-            <a:spAutoFit/>
-          </a:bodyPr>
-          <a:lstStyle/>
-          <a:p>
-            <a:pPr algn="l">
-              <a:spcAft>
-                <a:spcPts val="0"/>
-              </a:spcAft>
-            </a:pPr>
-            <a:r>
-              <a:rPr sz="1296" b="0" i="0">
-                <a:solidFill>
-                  <a:srgbClr val="E7F0F3"/>
-                </a:solidFill>
-                <a:latin typeface="Arial"/>
-              </a:rPr>
-              <a:t>r</a:t>
-            </a:r>
-          </a:p>
-        </p:txBody>
-      </p:sp>
-      <p:cxnSp>
-        <p:nvCxnSpPr>
-          <p:cNvPr id="15" name="arrow 13" descr="sci-ppt:obj-013"/>
-          <p:cNvCxnSpPr/>
-          <p:nvPr/>
-        </p:nvCxnSpPr>
-        <p:spPr>
-          <a:xfrm>
-            <a:off x="2697480" y="1645920"/>
-            <a:ext cx="1691640" cy="0"/>
-          </a:xfrm>
-          <a:prstGeom prst="line">
-            <a:avLst/>
-          </a:prstGeom>
-          <a:ln w="21590">
-            <a:solidFill>
-              <a:srgbClr val="8EDBD4"/>
-            </a:solidFill>
-            <a:headEnd type="none" w="med" len="med"/>
-            <a:tailEnd type="triangle" w="med" len="med"/>
-          </a:ln>
-          <a:effectLst/>
-        </p:spPr>
-      </p:cxnSp>
-      <p:sp>
-        <p:nvSpPr>
-          <p:cNvPr id="16" name="text 14" descr="sci-ppt:obj-014"/>
-          <p:cNvSpPr txBox="1"/>
-          <p:nvPr/>
-        </p:nvSpPr>
-        <p:spPr>
-          <a:xfrm>
-            <a:off x="2834640" y="1143000"/>
-            <a:ext cx="2286000" cy="310896"/>
-          </a:xfrm>
-          <a:prstGeom prst="rect">
-            <a:avLst/>
-          </a:prstGeom>
-          <a:noFill/>
-          <a:effectLst/>
-        </p:spPr>
-        <p:txBody>
-          <a:bodyPr wrap="none" lIns="0" rIns="0" tIns="0" bIns="0" anchor="ctr">
-            <a:spAutoFit/>
-          </a:bodyPr>
-          <a:lstStyle/>
-          <a:p>
-            <a:pPr algn="l">
-              <a:spcAft>
-                <a:spcPts val="0"/>
-              </a:spcAft>
-            </a:pPr>
-            <a:r>
-              <a:rPr sz="1296" b="0" i="0">
-                <a:solidFill>
-                  <a:srgbClr val="E7F0F3"/>
-                </a:solidFill>
-                <a:latin typeface="Arial"/>
-              </a:rPr>
-              <a:t>Material map</a:t>
-            </a:r>
-          </a:p>
-        </p:txBody>
-      </p:sp>
-      <p:sp>
-        <p:nvSpPr>
-          <p:cNvPr id="17" name="text 15" descr="sci-ppt:obj-015"/>
-          <p:cNvSpPr txBox="1"/>
-          <p:nvPr/>
-        </p:nvSpPr>
-        <p:spPr>
-          <a:xfrm>
-            <a:off x="1005840" y="2578608"/>
-            <a:ext cx="2286000" cy="310896"/>
-          </a:xfrm>
-          <a:prstGeom prst="rect">
-            <a:avLst/>
-          </a:prstGeom>
-          <a:noFill/>
-          <a:effectLst/>
-        </p:spPr>
-        <p:txBody>
-          <a:bodyPr wrap="none" lIns="0" rIns="0" tIns="0" bIns="0" anchor="ctr">
-            <a:spAutoFit/>
-          </a:bodyPr>
-          <a:lstStyle/>
-          <a:p>
-            <a:pPr algn="l">
-              <a:spcAft>
-                <a:spcPts val="0"/>
-              </a:spcAft>
-            </a:pPr>
-            <a:r>
-              <a:rPr sz="1296" b="0" i="0">
-                <a:solidFill>
-                  <a:srgbClr val="E7F0F3"/>
-                </a:solidFill>
-                <a:latin typeface="Arial"/>
-              </a:rPr>
-              <a:t>Reference</a:t>
-            </a:r>
-          </a:p>
-        </p:txBody>
-      </p:sp>
-      <p:sp>
-        <p:nvSpPr>
-          <p:cNvPr id="18" name="text 16" descr="sci-ppt:obj-016"/>
-          <p:cNvSpPr txBox="1"/>
-          <p:nvPr/>
-        </p:nvSpPr>
-        <p:spPr>
-          <a:xfrm>
-            <a:off x="4846320" y="2660904"/>
-            <a:ext cx="3383280" cy="310896"/>
-          </a:xfrm>
-          <a:prstGeom prst="rect">
-            <a:avLst/>
-          </a:prstGeom>
-          <a:noFill/>
-          <a:effectLst/>
-        </p:spPr>
-        <p:txBody>
-          <a:bodyPr wrap="none" lIns="0" rIns="0" tIns="0" bIns="0" anchor="ctr">
-            <a:spAutoFit/>
-          </a:bodyPr>
-          <a:lstStyle/>
-          <a:p>
-            <a:pPr algn="l">
-              <a:spcAft>
-                <a:spcPts val="0"/>
-              </a:spcAft>
-            </a:pPr>
-            <a:r>
-              <a:rPr sz="1296" b="0" i="0">
-                <a:solidFill>
-                  <a:srgbClr val="E7F0F3"/>
-                </a:solidFill>
-                <a:latin typeface="Arial"/>
-              </a:rPr>
-              <a:t>Deformed: λr , λθ</a:t>
-            </a:r>
-          </a:p>
-        </p:txBody>
-      </p:sp>
-      <p:sp>
-        <p:nvSpPr>
-          <p:cNvPr id="19" name="text 17" descr="sci-ppt:obj-017"/>
-          <p:cNvSpPr txBox="1"/>
-          <p:nvPr/>
-        </p:nvSpPr>
-        <p:spPr>
-          <a:xfrm>
-            <a:off x="6839712" y="777240"/>
-            <a:ext cx="1645920" cy="310896"/>
-          </a:xfrm>
-          <a:prstGeom prst="rect">
-            <a:avLst/>
-          </a:prstGeom>
-          <a:noFill/>
-          <a:effectLst/>
-        </p:spPr>
-        <p:txBody>
-          <a:bodyPr wrap="none" lIns="0" rIns="0" tIns="0" bIns="0" anchor="ctr">
-            <a:spAutoFit/>
-          </a:bodyPr>
-          <a:lstStyle/>
-          <a:p>
-            <a:pPr algn="l">
-              <a:spcAft>
-                <a:spcPts val="0"/>
-              </a:spcAft>
-            </a:pPr>
-            <a:r>
-              <a:rPr sz="1296" b="0" i="0">
-                <a:solidFill>
-                  <a:srgbClr val="E7F0F3"/>
-                </a:solidFill>
-                <a:latin typeface="Arial"/>
-              </a:rPr>
-              <a:t>Gg , ηg</a:t>
-            </a:r>
-          </a:p>
-        </p:txBody>
-      </p:sp>
-      <p:sp>
-        <p:nvSpPr>
-          <p:cNvPr id="20" name="text 18" descr="sci-ppt:obj-018"/>
-          <p:cNvSpPr txBox="1"/>
-          <p:nvPr/>
-        </p:nvSpPr>
-        <p:spPr>
-          <a:xfrm>
-            <a:off x="6839712" y="1207008"/>
-            <a:ext cx="1828800" cy="310896"/>
-          </a:xfrm>
-          <a:prstGeom prst="rect">
-            <a:avLst/>
-          </a:prstGeom>
-          <a:noFill/>
-          <a:effectLst/>
-        </p:spPr>
-        <p:txBody>
-          <a:bodyPr wrap="none" lIns="0" rIns="0" tIns="0" bIns="0" anchor="ctr">
-            <a:spAutoFit/>
-          </a:bodyPr>
-          <a:lstStyle/>
-          <a:p>
-            <a:pPr algn="l">
-              <a:spcAft>
-                <a:spcPts val="0"/>
-              </a:spcAft>
-            </a:pPr>
-            <a:r>
-              <a:rPr sz="1296" b="0" i="0">
-                <a:solidFill>
-                  <a:srgbClr val="E7F0F3"/>
-                </a:solidFill>
-                <a:latin typeface="Arial"/>
-              </a:rPr>
-              <a:t>σrr , σθθ</a:t>
-            </a:r>
-          </a:p>
-        </p:txBody>
-      </p:sp>
-      <p:sp>
-        <p:nvSpPr>
-          <p:cNvPr id="21" name="text 19" descr="sci-ppt:obj-019"/>
-          <p:cNvSpPr txBox="1"/>
-          <p:nvPr/>
-        </p:nvSpPr>
-        <p:spPr>
-          <a:xfrm>
-            <a:off x="6839712" y="1645920"/>
-            <a:ext cx="1371600" cy="310896"/>
-          </a:xfrm>
-          <a:prstGeom prst="rect">
-            <a:avLst/>
-          </a:prstGeom>
-          <a:noFill/>
-          <a:effectLst/>
-        </p:spPr>
-        <p:txBody>
-          <a:bodyPr wrap="none" lIns="0" rIns="0" tIns="0" bIns="0" anchor="ctr">
-            <a:spAutoFit/>
-          </a:bodyPr>
-          <a:lstStyle/>
-          <a:p>
-            <a:pPr algn="l">
-              <a:spcAft>
-                <a:spcPts val="0"/>
-              </a:spcAft>
-            </a:pPr>
-            <a:r>
-              <a:rPr sz="1296" b="0" i="0">
-                <a:solidFill>
-                  <a:srgbClr val="E7F0F3"/>
-                </a:solidFill>
-                <a:latin typeface="Arial"/>
-              </a:rPr>
-              <a:t>p∞</a:t>
-            </a:r>
-          </a:p>
-        </p:txBody>
-      </p:sp>
-      <p:sp>
-        <p:nvSpPr>
-          <p:cNvPr id="22" name="text 20" descr="sci-ppt:obj-020"/>
-          <p:cNvSpPr txBox="1"/>
-          <p:nvPr/>
-        </p:nvSpPr>
-        <p:spPr>
-          <a:xfrm>
-            <a:off x="5266944" y="1682496"/>
-            <a:ext cx="822960" cy="310896"/>
-          </a:xfrm>
-          <a:prstGeom prst="rect">
-            <a:avLst/>
-          </a:prstGeom>
-          <a:noFill/>
-          <a:effectLst/>
-        </p:spPr>
-        <p:txBody>
-          <a:bodyPr wrap="none" lIns="0" rIns="0" tIns="0" bIns="0" anchor="ctr">
-            <a:spAutoFit/>
-          </a:bodyPr>
-          <a:lstStyle/>
-          <a:p>
-            <a:pPr algn="l">
-              <a:spcAft>
-                <a:spcPts val="0"/>
-              </a:spcAft>
-            </a:pPr>
-            <a:r>
-              <a:rPr sz="1296" b="0" i="0">
-                <a:solidFill>
-                  <a:srgbClr val="E7F0F3"/>
-                </a:solidFill>
-                <a:latin typeface="Arial"/>
-              </a:rPr>
-              <a:t>pb</a:t>
-            </a:r>
-          </a:p>
-        </p:txBody>
-      </p:sp>
-      <p:sp>
-        <p:nvSpPr>
-          <p:cNvPr id="23" name="text 21" descr="sci-ppt:obj-021"/>
-          <p:cNvSpPr txBox="1"/>
-          <p:nvPr/>
-        </p:nvSpPr>
-        <p:spPr>
-          <a:xfrm>
-            <a:off x="868680" y="2990088"/>
-            <a:ext cx="7772400" cy="310896"/>
-          </a:xfrm>
-          <a:prstGeom prst="rect">
-            <a:avLst/>
-          </a:prstGeom>
-          <a:noFill/>
-          <a:effectLst/>
-        </p:spPr>
-        <p:txBody>
-          <a:bodyPr wrap="none" lIns="0" rIns="0" tIns="0" bIns="0" anchor="ctr">
-            <a:spAutoFit/>
-          </a:bodyPr>
-          <a:lstStyle/>
-          <a:p>
-            <a:pPr algn="l">
-              <a:spcAft>
-                <a:spcPts val="0"/>
-              </a:spcAft>
-            </a:pPr>
-            <a:r>
-              <a:rPr sz="1152" b="0" i="0">
-                <a:solidFill>
-                  <a:srgbClr val="E7F0F3"/>
-                </a:solidFill>
-                <a:latin typeface="Arial"/>
-              </a:rPr>
-              <a:t>r₀³ − Rref³ = r³ − R³ ; radial coordinates point outward</a:t>
-            </a:r>
-          </a:p>
-        </p:txBody>
-      </p:sp>
-      <p:sp>
-        <p:nvSpPr>
-          <p:cNvPr id="24" name="text 22" descr="sci-ppt:obj-022"/>
-          <p:cNvSpPr txBox="1"/>
-          <p:nvPr/>
-        </p:nvSpPr>
-        <p:spPr>
-          <a:xfrm>
-            <a:off x="256032" y="3465576"/>
-            <a:ext cx="7315200" cy="310896"/>
-          </a:xfrm>
-          <a:prstGeom prst="rect">
-            <a:avLst/>
-          </a:prstGeom>
-          <a:noFill/>
-          <a:effectLst/>
-        </p:spPr>
-        <p:txBody>
-          <a:bodyPr wrap="none" lIns="0" rIns="0" tIns="0" bIns="0" anchor="ctr">
-            <a:spAutoFit/>
-          </a:bodyPr>
-          <a:lstStyle/>
-          <a:p>
-            <a:pPr algn="l">
-              <a:spcAft>
-                <a:spcPts val="0"/>
-              </a:spcAft>
-            </a:pPr>
-            <a:r>
-              <a:rPr sz="1296" b="0" i="0">
-                <a:solidFill>
-                  <a:srgbClr val="8EDBD4"/>
-                </a:solidFill>
-                <a:latin typeface="Arial"/>
-              </a:rPr>
-              <a:t>Variables and physical limits</a:t>
-            </a:r>
-          </a:p>
-        </p:txBody>
-      </p:sp>
-      <p:sp>
-        <p:nvSpPr>
-          <p:cNvPr id="25" name="text 23" descr="sci-ppt:obj-023"/>
-          <p:cNvSpPr txBox="1"/>
-          <p:nvPr/>
-        </p:nvSpPr>
-        <p:spPr>
-          <a:xfrm>
-            <a:off x="365760" y="3813048"/>
-            <a:ext cx="8412480" cy="310896"/>
-          </a:xfrm>
-          <a:prstGeom prst="rect">
-            <a:avLst/>
-          </a:prstGeom>
-          <a:noFill/>
-          <a:effectLst/>
-        </p:spPr>
-        <p:txBody>
-          <a:bodyPr wrap="none" lIns="0" rIns="0" tIns="0" bIns="0" anchor="ctr">
-            <a:spAutoFit/>
-          </a:bodyPr>
-          <a:lstStyle/>
-          <a:p>
-            <a:pPr algn="l">
-              <a:spcAft>
-                <a:spcPts val="0"/>
-              </a:spcAft>
-            </a:pPr>
-            <a:r>
-              <a:rPr sz="1152" b="0" i="0">
-                <a:solidFill>
-                  <a:srgbClr val="E7F0F3"/>
-                </a:solidFill>
-                <a:latin typeface="Arial"/>
-              </a:rPr>
-              <a:t>• Gg = 20 kPa</a:t>
-            </a:r>
-          </a:p>
-        </p:txBody>
-      </p:sp>
-      <p:sp>
-        <p:nvSpPr>
-          <p:cNvPr id="26" name="text 24" descr="sci-ppt:obj-024"/>
-          <p:cNvSpPr txBox="1"/>
-          <p:nvPr/>
-        </p:nvSpPr>
-        <p:spPr>
-          <a:xfrm>
-            <a:off x="365760" y="4023360"/>
-            <a:ext cx="8412480" cy="310896"/>
-          </a:xfrm>
-          <a:prstGeom prst="rect">
-            <a:avLst/>
-          </a:prstGeom>
-          <a:noFill/>
-          <a:effectLst/>
-        </p:spPr>
-        <p:txBody>
-          <a:bodyPr wrap="none" lIns="0" rIns="0" tIns="0" bIns="0" anchor="ctr">
-            <a:spAutoFit/>
-          </a:bodyPr>
-          <a:lstStyle/>
-          <a:p>
-            <a:pPr algn="l">
-              <a:spcAft>
-                <a:spcPts val="0"/>
-              </a:spcAft>
-            </a:pPr>
-            <a:r>
-              <a:rPr sz="1152" b="0" i="0">
-                <a:solidFill>
-                  <a:srgbClr val="E7F0F3"/>
-                </a:solidFill>
-                <a:latin typeface="Arial"/>
-              </a:rPr>
-              <a:t>• Rref = 5 µm</a:t>
-            </a:r>
-          </a:p>
-        </p:txBody>
-      </p:sp>
-      <p:sp>
-        <p:nvSpPr>
-          <p:cNvPr id="27" name="text 25" descr="sci-ppt:obj-025"/>
-          <p:cNvSpPr txBox="1"/>
-          <p:nvPr/>
-        </p:nvSpPr>
-        <p:spPr>
-          <a:xfrm>
-            <a:off x="365760" y="4233672"/>
-            <a:ext cx="8412480" cy="310896"/>
-          </a:xfrm>
-          <a:prstGeom prst="rect">
-            <a:avLst/>
-          </a:prstGeom>
-          <a:noFill/>
-          <a:effectLst/>
-        </p:spPr>
-        <p:txBody>
-          <a:bodyPr wrap="none" lIns="0" rIns="0" tIns="0" bIns="0" anchor="ctr">
-            <a:spAutoFit/>
-          </a:bodyPr>
-          <a:lstStyle/>
-          <a:p>
-            <a:pPr algn="l">
-              <a:spcAft>
-                <a:spcPts val="0"/>
-              </a:spcAft>
-            </a:pPr>
-            <a:r>
-              <a:rPr sz="1152" b="0" i="0">
-                <a:solidFill>
-                  <a:srgbClr val="E7F0F3"/>
-                </a:solidFill>
-                <a:latin typeface="Arial"/>
-              </a:rPr>
-              <a:t>• R = 30 µm</a:t>
-            </a:r>
-          </a:p>
-        </p:txBody>
-      </p:sp>
-      <p:sp>
-        <p:nvSpPr>
-          <p:cNvPr id="28" name="text 26" descr="sci-ppt:obj-026"/>
-          <p:cNvSpPr txBox="1"/>
-          <p:nvPr/>
-        </p:nvSpPr>
-        <p:spPr>
-          <a:xfrm>
-            <a:off x="365760" y="4443984"/>
-            <a:ext cx="8412480" cy="310896"/>
-          </a:xfrm>
-          <a:prstGeom prst="rect">
-            <a:avLst/>
-          </a:prstGeom>
-          <a:noFill/>
-          <a:effectLst/>
-        </p:spPr>
-        <p:txBody>
-          <a:bodyPr wrap="none" lIns="0" rIns="0" tIns="0" bIns="0" anchor="ctr">
-            <a:spAutoFit/>
-          </a:bodyPr>
-          <a:lstStyle/>
-          <a:p>
-            <a:pPr algn="l">
-              <a:spcAft>
-                <a:spcPts val="0"/>
-              </a:spcAft>
-            </a:pPr>
-            <a:r>
-              <a:rPr sz="1152" b="0" i="0">
-                <a:solidFill>
-                  <a:srgbClr val="E7F0F3"/>
-                </a:solidFill>
-                <a:latin typeface="Arial"/>
-              </a:rPr>
-              <a:t>• pel = 43.3256 kPa</a:t>
-            </a:r>
-          </a:p>
-        </p:txBody>
-      </p:sp>
-      <p:sp>
-        <p:nvSpPr>
-          <p:cNvPr id="29" name="text 27" descr="sci-ppt:obj-027"/>
-          <p:cNvSpPr txBox="1"/>
-          <p:nvPr/>
-        </p:nvSpPr>
-        <p:spPr>
-          <a:xfrm>
-            <a:off x="365760" y="4654296"/>
-            <a:ext cx="8412480" cy="310896"/>
-          </a:xfrm>
-          <a:prstGeom prst="rect">
-            <a:avLst/>
-          </a:prstGeom>
-          <a:noFill/>
-          <a:effectLst/>
-        </p:spPr>
-        <p:txBody>
-          <a:bodyPr wrap="none" lIns="0" rIns="0" tIns="0" bIns="0" anchor="ctr">
-            <a:spAutoFit/>
-          </a:bodyPr>
-          <a:lstStyle/>
-          <a:p>
-            <a:pPr algn="l">
-              <a:spcAft>
-                <a:spcPts val="0"/>
-              </a:spcAft>
-            </a:pPr>
-            <a:r>
-              <a:rPr sz="1152" b="0" i="0">
-                <a:solidFill>
-                  <a:srgbClr val="E7F0F3"/>
-                </a:solidFill>
-                <a:latin typeface="Arial"/>
-              </a:rPr>
-              <a:t>• Wg = 4.51604 nJ</a:t>
-            </a:r>
-          </a:p>
-        </p:txBody>
-      </p:sp>
-      <p:sp>
-        <p:nvSpPr>
-          <p:cNvPr id="30" name="text 28" descr="sci-ppt:obj-028"/>
-          <p:cNvSpPr txBox="1"/>
-          <p:nvPr/>
-        </p:nvSpPr>
-        <p:spPr>
-          <a:xfrm>
-            <a:off x="365760" y="4864608"/>
-            <a:ext cx="8412480" cy="310896"/>
-          </a:xfrm>
-          <a:prstGeom prst="rect">
-            <a:avLst/>
-          </a:prstGeom>
-          <a:noFill/>
-          <a:effectLst/>
-        </p:spPr>
-        <p:txBody>
-          <a:bodyPr wrap="none" lIns="0" rIns="0" tIns="0" bIns="0" anchor="ctr">
-            <a:spAutoFit/>
-          </a:bodyPr>
-          <a:lstStyle/>
-          <a:p>
-            <a:pPr algn="l">
-              <a:spcAft>
-                <a:spcPts val="0"/>
-              </a:spcAft>
-            </a:pPr>
-            <a:r>
-              <a:rPr sz="1152" b="0" i="0">
-                <a:solidFill>
-                  <a:srgbClr val="E7F0F3"/>
-                </a:solidFill>
-                <a:latin typeface="Arial"/>
-              </a:rPr>
-              <a:t>Sixfold wall stretch: intactness is unverified</a:t>
-            </a:r>
-          </a:p>
-        </p:txBody>
-      </p:sp>
-      <p:sp>
-        <p:nvSpPr>
-          <p:cNvPr id="31" name="text 29" descr="sci-ppt:obj-029"/>
-          <p:cNvSpPr txBox="1"/>
-          <p:nvPr/>
-        </p:nvSpPr>
-        <p:spPr>
-          <a:xfrm>
-            <a:off x="365760" y="5074920"/>
-            <a:ext cx="8412480" cy="310896"/>
-          </a:xfrm>
-          <a:prstGeom prst="rect">
-            <a:avLst/>
-          </a:prstGeom>
-          <a:noFill/>
-          <a:effectLst/>
-        </p:spPr>
-        <p:txBody>
-          <a:bodyPr wrap="none" lIns="0" rIns="0" tIns="0" bIns="0" anchor="ctr">
-            <a:spAutoFit/>
-          </a:bodyPr>
-          <a:lstStyle/>
-          <a:p>
-            <a:pPr algn="l">
-              <a:spcAft>
-                <a:spcPts val="0"/>
-              </a:spcAft>
-            </a:pPr>
-            <a:r>
-              <a:rPr sz="1152" b="0" i="0">
-                <a:solidFill>
-                  <a:srgbClr val="E7F0F3"/>
-                </a:solidFill>
-                <a:latin typeface="Arial"/>
-              </a:rPr>
-              <a:t>Values are not PFC formulation measurements</a:t>
+              <a:t>Teaching-input substitution of Eq. A-E13 (values recomputed from the closed forms).</a:t>
             </a:r>
           </a:p>
         </p:txBody>
